--- a/Side Meetings/AgentImpact2YANG.pptx
+++ b/Side Meetings/AgentImpact2YANG.pptx
@@ -214,7 +214,7 @@
           <a:p>
             <a:fld id="{2EF0CF82-65EC-44B8-81F8-2F4982E48986}" type="datetimeFigureOut">
               <a:rPr lang="en-US" smtClean="0"/>
-              <a:t>7/10/2026</a:t>
+              <a:t>7/13/2026</a:t>
             </a:fld>
             <a:endParaRPr lang="en-US"/>
           </a:p>
@@ -697,7 +697,7 @@
           <a:p>
             <a:fld id="{BADEE5B8-BB87-4586-AA02-8EB91A2F44B9}" type="datetimeFigureOut">
               <a:rPr lang="en-US" smtClean="0"/>
-              <a:t>7/10/2026</a:t>
+              <a:t>7/13/2026</a:t>
             </a:fld>
             <a:endParaRPr lang="en-US"/>
           </a:p>
@@ -867,7 +867,7 @@
           <a:p>
             <a:fld id="{BADEE5B8-BB87-4586-AA02-8EB91A2F44B9}" type="datetimeFigureOut">
               <a:rPr lang="en-US" smtClean="0"/>
-              <a:t>7/10/2026</a:t>
+              <a:t>7/13/2026</a:t>
             </a:fld>
             <a:endParaRPr lang="en-US"/>
           </a:p>
@@ -1047,7 +1047,7 @@
           <a:p>
             <a:fld id="{BADEE5B8-BB87-4586-AA02-8EB91A2F44B9}" type="datetimeFigureOut">
               <a:rPr lang="en-US" smtClean="0"/>
-              <a:t>7/10/2026</a:t>
+              <a:t>7/13/2026</a:t>
             </a:fld>
             <a:endParaRPr lang="en-US"/>
           </a:p>
@@ -1217,7 +1217,7 @@
           <a:p>
             <a:fld id="{BADEE5B8-BB87-4586-AA02-8EB91A2F44B9}" type="datetimeFigureOut">
               <a:rPr lang="en-US" smtClean="0"/>
-              <a:t>7/10/2026</a:t>
+              <a:t>7/13/2026</a:t>
             </a:fld>
             <a:endParaRPr lang="en-US"/>
           </a:p>
@@ -1463,7 +1463,7 @@
           <a:p>
             <a:fld id="{BADEE5B8-BB87-4586-AA02-8EB91A2F44B9}" type="datetimeFigureOut">
               <a:rPr lang="en-US" smtClean="0"/>
-              <a:t>7/10/2026</a:t>
+              <a:t>7/13/2026</a:t>
             </a:fld>
             <a:endParaRPr lang="en-US"/>
           </a:p>
@@ -1695,7 +1695,7 @@
           <a:p>
             <a:fld id="{BADEE5B8-BB87-4586-AA02-8EB91A2F44B9}" type="datetimeFigureOut">
               <a:rPr lang="en-US" smtClean="0"/>
-              <a:t>7/10/2026</a:t>
+              <a:t>7/13/2026</a:t>
             </a:fld>
             <a:endParaRPr lang="en-US"/>
           </a:p>
@@ -2062,7 +2062,7 @@
           <a:p>
             <a:fld id="{BADEE5B8-BB87-4586-AA02-8EB91A2F44B9}" type="datetimeFigureOut">
               <a:rPr lang="en-US" smtClean="0"/>
-              <a:t>7/10/2026</a:t>
+              <a:t>7/13/2026</a:t>
             </a:fld>
             <a:endParaRPr lang="en-US"/>
           </a:p>
@@ -2180,7 +2180,7 @@
           <a:p>
             <a:fld id="{BADEE5B8-BB87-4586-AA02-8EB91A2F44B9}" type="datetimeFigureOut">
               <a:rPr lang="en-US" smtClean="0"/>
-              <a:t>7/10/2026</a:t>
+              <a:t>7/13/2026</a:t>
             </a:fld>
             <a:endParaRPr lang="en-US"/>
           </a:p>
@@ -2275,7 +2275,7 @@
           <a:p>
             <a:fld id="{BADEE5B8-BB87-4586-AA02-8EB91A2F44B9}" type="datetimeFigureOut">
               <a:rPr lang="en-US" smtClean="0"/>
-              <a:t>7/10/2026</a:t>
+              <a:t>7/13/2026</a:t>
             </a:fld>
             <a:endParaRPr lang="en-US"/>
           </a:p>
@@ -2552,7 +2552,7 @@
           <a:p>
             <a:fld id="{BADEE5B8-BB87-4586-AA02-8EB91A2F44B9}" type="datetimeFigureOut">
               <a:rPr lang="en-US" smtClean="0"/>
-              <a:t>7/10/2026</a:t>
+              <a:t>7/13/2026</a:t>
             </a:fld>
             <a:endParaRPr lang="en-US"/>
           </a:p>
@@ -2805,7 +2805,7 @@
           <a:p>
             <a:fld id="{BADEE5B8-BB87-4586-AA02-8EB91A2F44B9}" type="datetimeFigureOut">
               <a:rPr lang="en-US" smtClean="0"/>
-              <a:t>7/10/2026</a:t>
+              <a:t>7/13/2026</a:t>
             </a:fld>
             <a:endParaRPr lang="en-US"/>
           </a:p>
@@ -3018,7 +3018,7 @@
           <a:p>
             <a:fld id="{BADEE5B8-BB87-4586-AA02-8EB91A2F44B9}" type="datetimeFigureOut">
               <a:rPr lang="en-US" smtClean="0"/>
-              <a:t>7/10/2026</a:t>
+              <a:t>7/13/2026</a:t>
             </a:fld>
             <a:endParaRPr lang="en-US"/>
           </a:p>
@@ -3696,7 +3696,6 @@
               <a:rPr lang="en-US" sz="1200" dirty="0" smtClean="0"/>
               <a:t>The core challenge is translating high-level natural language negotiations into precise YANG representations without losing context. </a:t>
             </a:r>
-            <a:endParaRPr lang="en-US" sz="1200" dirty="0" smtClean="0"/>
           </a:p>
         </p:txBody>
       </p:sp>
@@ -4255,11 +4254,7 @@
             </a:pPr>
             <a:r>
               <a:rPr lang="en-US" dirty="0" smtClean="0"/>
-              <a:t>Context drift: even minor shifts in historical context can alter outcomes for identical tasks</a:t>
-            </a:r>
-            <a:r>
-              <a:rPr lang="en-US" dirty="0" smtClean="0"/>
-              <a:t>.</a:t>
+              <a:t>Context drift: even minor shifts in historical context can alter outcomes for identical tasks.</a:t>
             </a:r>
           </a:p>
           <a:p>
@@ -4586,11 +4581,7 @@
           <a:p>
             <a:r>
               <a:rPr lang="en-US" dirty="0" smtClean="0"/>
-              <a:t>Potential </a:t>
-            </a:r>
-            <a:r>
-              <a:rPr lang="en-US" dirty="0" smtClean="0"/>
-              <a:t>Ways Forward</a:t>
+              <a:t>Potential Ways Forward</a:t>
             </a:r>
             <a:endParaRPr lang="en-US" dirty="0"/>
           </a:p>
@@ -5027,18 +5018,7 @@
                 <a:ea typeface="Calibri" pitchFamily="34" charset="-122"/>
                 <a:cs typeface="Calibri" pitchFamily="34" charset="-120"/>
               </a:rPr>
-              <a:t>① </a:t>
-            </a:r>
-            <a:r>
-              <a:rPr lang="en-US" sz="1600" b="1" dirty="0">
-                <a:solidFill>
-                  <a:srgbClr val="1B2A4A"/>
-                </a:solidFill>
-                <a:latin typeface="Calibri" pitchFamily="34" charset="0"/>
-                <a:ea typeface="Calibri" pitchFamily="34" charset="-122"/>
-                <a:cs typeface="Calibri" pitchFamily="34" charset="-120"/>
-              </a:rPr>
-              <a:t>AI-</a:t>
+              <a:t>① AI-</a:t>
             </a:r>
             <a:r>
               <a:rPr lang="en-US" sz="1600" b="1" dirty="0" err="1">
@@ -5062,14 +5042,6 @@
               </a:rPr>
               <a:t> Tools</a:t>
             </a:r>
-            <a:endParaRPr lang="en-US" sz="1600" b="1" dirty="0">
-              <a:solidFill>
-                <a:srgbClr val="1B2A4A"/>
-              </a:solidFill>
-              <a:latin typeface="Calibri" pitchFamily="34" charset="0"/>
-              <a:ea typeface="Calibri" pitchFamily="34" charset="-122"/>
-              <a:cs typeface="Calibri" pitchFamily="34" charset="-120"/>
-            </a:endParaRPr>
           </a:p>
         </p:txBody>
       </p:sp>
@@ -5259,18 +5231,7 @@
                 <a:ea typeface="Calibri" pitchFamily="34" charset="-122"/>
                 <a:cs typeface="Calibri" pitchFamily="34" charset="-120"/>
               </a:rPr>
-              <a:t>② </a:t>
-            </a:r>
-            <a:r>
-              <a:rPr lang="en-US" sz="1600" b="1" dirty="0">
-                <a:solidFill>
-                  <a:srgbClr val="1B2A4A"/>
-                </a:solidFill>
-                <a:latin typeface="Calibri" pitchFamily="34" charset="0"/>
-                <a:ea typeface="Calibri" pitchFamily="34" charset="-122"/>
-                <a:cs typeface="Calibri" pitchFamily="34" charset="-120"/>
-              </a:rPr>
-              <a:t>Semantic Enhancement via Knowledge Graphs &amp; Semantic Metadata</a:t>
+              <a:t>② Semantic Enhancement via Knowledge Graphs &amp; Semantic Metadata</a:t>
             </a:r>
           </a:p>
           <a:p>
@@ -5467,27 +5428,8 @@
                 <a:ea typeface="Calibri" pitchFamily="34" charset="-122"/>
                 <a:cs typeface="Calibri" pitchFamily="34" charset="-120"/>
               </a:rPr>
-              <a:t>③ </a:t>
-            </a:r>
-            <a:r>
-              <a:rPr lang="en-US" sz="1600" b="1" dirty="0">
-                <a:solidFill>
-                  <a:srgbClr val="1B2A4A"/>
-                </a:solidFill>
-                <a:latin typeface="Calibri" pitchFamily="34" charset="0"/>
-                <a:ea typeface="Calibri" pitchFamily="34" charset="-122"/>
-                <a:cs typeface="Calibri" pitchFamily="34" charset="-120"/>
-              </a:rPr>
-              <a:t>Declarative Intent/Policy Overlay</a:t>
-            </a:r>
-            <a:endParaRPr lang="en-US" sz="1600" b="1" dirty="0">
-              <a:solidFill>
-                <a:srgbClr val="1B2A4A"/>
-              </a:solidFill>
-              <a:latin typeface="Calibri" pitchFamily="34" charset="0"/>
-              <a:ea typeface="Calibri" pitchFamily="34" charset="-122"/>
-              <a:cs typeface="Calibri" pitchFamily="34" charset="-120"/>
-            </a:endParaRPr>
+              <a:t>③ Declarative Intent/Policy Overlay</a:t>
+            </a:r>
           </a:p>
         </p:txBody>
       </p:sp>
@@ -5677,27 +5619,8 @@
                 <a:ea typeface="Calibri" pitchFamily="34" charset="-122"/>
                 <a:cs typeface="Calibri" pitchFamily="34" charset="-120"/>
               </a:rPr>
-              <a:t>④ </a:t>
-            </a:r>
-            <a:r>
-              <a:rPr lang="en-US" sz="1600" b="1" dirty="0">
-                <a:solidFill>
-                  <a:srgbClr val="1B2A4A"/>
-                </a:solidFill>
-                <a:latin typeface="Calibri" pitchFamily="34" charset="0"/>
-                <a:ea typeface="Calibri" pitchFamily="34" charset="-122"/>
-                <a:cs typeface="Calibri" pitchFamily="34" charset="-120"/>
-              </a:rPr>
-              <a:t>Token-Efficient YANG Serialization</a:t>
-            </a:r>
-            <a:endParaRPr lang="en-US" sz="1600" b="1" dirty="0">
-              <a:solidFill>
-                <a:srgbClr val="1B2A4A"/>
-              </a:solidFill>
-              <a:latin typeface="Calibri" pitchFamily="34" charset="0"/>
-              <a:ea typeface="Calibri" pitchFamily="34" charset="-122"/>
-              <a:cs typeface="Calibri" pitchFamily="34" charset="-120"/>
-            </a:endParaRPr>
+              <a:t>④ Token-Efficient YANG Serialization</a:t>
+            </a:r>
           </a:p>
         </p:txBody>
       </p:sp>
@@ -8784,11 +8707,7 @@
           <a:p>
             <a:r>
               <a:rPr lang="en-US" sz="2000" b="1" dirty="0" smtClean="0"/>
-              <a:t>Core </a:t>
-            </a:r>
-            <a:r>
-              <a:rPr lang="en-US" sz="2000" b="1" dirty="0" smtClean="0"/>
-              <a:t>idea:</a:t>
+              <a:t>Core idea:</a:t>
             </a:r>
           </a:p>
           <a:p>
@@ -8808,29 +8727,12 @@
               <a:rPr lang="en-US" sz="1800" dirty="0" smtClean="0"/>
               <a:t>invariants, constraints, policies that existing YANG models cannot represent</a:t>
             </a:r>
-            <a:endParaRPr lang="en-US" sz="1800" dirty="0" smtClean="0"/>
           </a:p>
           <a:p>
             <a:pPr lvl="1"/>
             <a:r>
               <a:rPr lang="en-US" sz="1800" dirty="0" smtClean="0"/>
-              <a:t>The overlay is</a:t>
-            </a:r>
-            <a:r>
-              <a:rPr lang="en-US" sz="1800" dirty="0" smtClean="0"/>
-              <a:t> </a:t>
-            </a:r>
-            <a:r>
-              <a:rPr lang="en-US" sz="1800" dirty="0" smtClean="0"/>
-              <a:t>co-delivered alongside the generated </a:t>
-            </a:r>
-            <a:r>
-              <a:rPr lang="en-US" sz="1800" dirty="0" smtClean="0"/>
-              <a:t>YANG </a:t>
-            </a:r>
-            <a:r>
-              <a:rPr lang="en-US" sz="1800" dirty="0" smtClean="0"/>
-              <a:t>instances to lower-layer agents</a:t>
+              <a:t>The overlay is co-delivered alongside the generated YANG instances to lower-layer agents</a:t>
             </a:r>
             <a:endParaRPr lang="en-US" sz="1800" dirty="0"/>
           </a:p>
@@ -8872,7 +8774,7 @@
         </p:nvSpPr>
         <p:spPr>
           <a:xfrm>
-            <a:off x="544922" y="5197600"/>
+            <a:off x="656890" y="5213796"/>
             <a:ext cx="9706632" cy="1477328"/>
           </a:xfrm>
           <a:prstGeom prst="rect">
@@ -9136,8 +9038,8 @@
         </p:nvSpPr>
         <p:spPr>
           <a:xfrm>
-            <a:off x="8335446" y="6350753"/>
-            <a:ext cx="2040495" cy="369332"/>
+            <a:off x="8327540" y="6537361"/>
+            <a:ext cx="1834220" cy="338554"/>
           </a:xfrm>
           <a:prstGeom prst="rect">
             <a:avLst/>
@@ -9151,10 +9053,10 @@
           <a:lstStyle/>
           <a:p>
             <a:r>
-              <a:rPr lang="en-US" dirty="0" smtClean="0"/>
+              <a:rPr lang="en-US" sz="1600" dirty="0" smtClean="0"/>
               <a:t>Format Comparison</a:t>
             </a:r>
-            <a:endParaRPr lang="en-US" dirty="0"/>
+            <a:endParaRPr lang="en-US" sz="1600" dirty="0"/>
           </a:p>
         </p:txBody>
       </p:sp>
@@ -9166,7 +9068,7 @@
         </p:nvSpPr>
         <p:spPr>
           <a:xfrm>
-            <a:off x="7016927" y="1263189"/>
+            <a:off x="7026258" y="1563774"/>
             <a:ext cx="1842248" cy="4832092"/>
           </a:xfrm>
           <a:prstGeom prst="rect">
@@ -9322,7 +9224,7 @@
         </p:nvSpPr>
         <p:spPr>
           <a:xfrm>
-            <a:off x="9493231" y="2924653"/>
+            <a:off x="9502562" y="3225238"/>
             <a:ext cx="2581835" cy="954107"/>
           </a:xfrm>
           <a:prstGeom prst="rect">
@@ -9376,7 +9278,7 @@
         </p:nvSpPr>
         <p:spPr>
           <a:xfrm>
-            <a:off x="7329857" y="6004000"/>
+            <a:off x="7339188" y="6304585"/>
             <a:ext cx="1094530" cy="307777"/>
           </a:xfrm>
           <a:prstGeom prst="rect">
@@ -9406,7 +9308,7 @@
         </p:nvSpPr>
         <p:spPr>
           <a:xfrm>
-            <a:off x="10072758" y="6004000"/>
+            <a:off x="10082089" y="6304585"/>
             <a:ext cx="1156792" cy="307777"/>
           </a:xfrm>
           <a:prstGeom prst="rect">
@@ -9460,8 +9362,8 @@
         </p:nvSpPr>
         <p:spPr>
           <a:xfrm>
-            <a:off x="248303" y="6027588"/>
-            <a:ext cx="6134568" cy="646331"/>
+            <a:off x="399678" y="6027587"/>
+            <a:ext cx="6242721" cy="584775"/>
           </a:xfrm>
           <a:prstGeom prst="rect">
             <a:avLst/>
@@ -9480,7 +9382,7 @@
           <a:lstStyle/>
           <a:p>
             <a:r>
-              <a:rPr lang="en-US" dirty="0" smtClean="0"/>
+              <a:rPr lang="en-US" sz="1600" dirty="0" smtClean="0"/>
               <a:t>TOON achieves 76.4% accuracy (vs JSON's 75.0%) while using 39.9% fewer tokens.</a:t>
             </a:r>
           </a:p>
@@ -9494,7 +9396,7 @@
         </p:nvSpPr>
         <p:spPr>
           <a:xfrm>
-            <a:off x="6950206" y="1322606"/>
+            <a:off x="6959537" y="1623191"/>
             <a:ext cx="2277036" cy="4704982"/>
           </a:xfrm>
           <a:prstGeom prst="rect">
@@ -9524,7 +9426,7 @@
         </p:nvSpPr>
         <p:spPr>
           <a:xfrm>
-            <a:off x="9535048" y="2942203"/>
+            <a:off x="9544379" y="3242788"/>
             <a:ext cx="2232212" cy="945811"/>
           </a:xfrm>
           <a:prstGeom prst="rect">
@@ -9543,6 +9445,88 @@
           <a:p>
             <a:pPr algn="ctr"/>
             <a:endParaRPr lang="en-US"/>
+          </a:p>
+        </p:txBody>
+      </p:sp>
+      <p:sp>
+        <p:nvSpPr>
+          <p:cNvPr id="13" name="文本框 12"/>
+          <p:cNvSpPr txBox="1"/>
+          <p:nvPr/>
+        </p:nvSpPr>
+        <p:spPr>
+          <a:xfrm>
+            <a:off x="399678" y="6581001"/>
+            <a:ext cx="4489755" cy="276999"/>
+          </a:xfrm>
+          <a:prstGeom prst="rect">
+            <a:avLst/>
+          </a:prstGeom>
+          <a:noFill/>
+        </p:spPr>
+        <p:txBody>
+          <a:bodyPr wrap="none" rtlCol="0">
+            <a:spAutoFit/>
+          </a:bodyPr>
+          <a:lstStyle/>
+          <a:p>
+            <a:r>
+              <a:rPr lang="en-US" altLang="zh-CN" sz="1200" dirty="0"/>
+              <a:t>statistics source</a:t>
+            </a:r>
+            <a:r>
+              <a:rPr lang="en-US" altLang="zh-CN" sz="1200" dirty="0" smtClean="0"/>
+              <a:t>: </a:t>
+            </a:r>
+            <a:r>
+              <a:rPr lang="en-US" altLang="zh-CN" sz="1200" dirty="0" smtClean="0">
+                <a:hlinkClick r:id="rId5"/>
+              </a:rPr>
+              <a:t>https</a:t>
+            </a:r>
+            <a:r>
+              <a:rPr lang="en-US" altLang="zh-CN" sz="1200" dirty="0">
+                <a:hlinkClick r:id="rId5"/>
+              </a:rPr>
+              <a:t>://</a:t>
+            </a:r>
+            <a:r>
+              <a:rPr lang="en-US" altLang="zh-CN" sz="1200" dirty="0" smtClean="0">
+                <a:hlinkClick r:id="rId5"/>
+              </a:rPr>
+              <a:t>github.com/toon-format/toon#benchmarks</a:t>
+            </a:r>
+            <a:r>
+              <a:rPr lang="en-US" altLang="zh-CN" sz="1200" dirty="0" smtClean="0"/>
+              <a:t>  </a:t>
+            </a:r>
+            <a:endParaRPr lang="en-US" sz="1200" dirty="0"/>
+          </a:p>
+        </p:txBody>
+      </p:sp>
+      <p:sp>
+        <p:nvSpPr>
+          <p:cNvPr id="14" name="文本框 13"/>
+          <p:cNvSpPr txBox="1"/>
+          <p:nvPr/>
+        </p:nvSpPr>
+        <p:spPr>
+          <a:xfrm>
+            <a:off x="6534247" y="1363132"/>
+            <a:ext cx="5550150" cy="369332"/>
+          </a:xfrm>
+          <a:prstGeom prst="rect">
+            <a:avLst/>
+          </a:prstGeom>
+          <a:noFill/>
+        </p:spPr>
+        <p:txBody>
+          <a:bodyPr wrap="square" rtlCol="0">
+            <a:spAutoFit/>
+          </a:bodyPr>
+          <a:lstStyle/>
+          <a:p>
+            <a:endParaRPr lang="en-US" dirty="0"/>
           </a:p>
         </p:txBody>
       </p:sp>
@@ -10625,11 +10609,7 @@
             </a:pPr>
             <a:r>
               <a:rPr lang="en-US" sz="2400" dirty="0" smtClean="0"/>
-              <a:t>Highly </a:t>
-            </a:r>
-            <a:r>
-              <a:rPr lang="en-US" sz="2400" dirty="0" smtClean="0"/>
-              <a:t>Structured Interface &amp; Data Modeling</a:t>
+              <a:t>Highly Structured Interface &amp; Data Modeling</a:t>
             </a:r>
           </a:p>
           <a:p>
@@ -11182,18 +11162,7 @@
                 <a:ea typeface="Calibri" pitchFamily="34" charset="-122"/>
                 <a:cs typeface="Calibri" pitchFamily="34" charset="-120"/>
               </a:rPr>
-              <a:t>Agent-to Agent communication </a:t>
-            </a:r>
-            <a:r>
-              <a:rPr lang="en-US" sz="950" i="1" dirty="0" smtClean="0">
-                <a:solidFill>
-                  <a:srgbClr val="5B6B7A"/>
-                </a:solidFill>
-                <a:latin typeface="Calibri" pitchFamily="34" charset="0"/>
-                <a:ea typeface="Calibri" pitchFamily="34" charset="-122"/>
-                <a:cs typeface="Calibri" pitchFamily="34" charset="-120"/>
-              </a:rPr>
-              <a:t>Protocol</a:t>
+              <a:t>Agent-to Agent communication Protocol</a:t>
             </a:r>
             <a:endParaRPr lang="en-US" sz="950" dirty="0"/>
           </a:p>
@@ -12987,18 +12956,7 @@
                 <a:ea typeface="Cambria" pitchFamily="34" charset="-122"/>
                 <a:cs typeface="Cambria" pitchFamily="34" charset="-120"/>
               </a:rPr>
-              <a:t>Network operational state</a:t>
-            </a:r>
-            <a:r>
-              <a:rPr lang="en-US" sz="1350" b="1" dirty="0" smtClean="0">
-                <a:solidFill>
-                  <a:srgbClr val="1E2A33"/>
-                </a:solidFill>
-                <a:latin typeface="Cambria" pitchFamily="34" charset="0"/>
-                <a:ea typeface="Cambria" pitchFamily="34" charset="-122"/>
-                <a:cs typeface="Cambria" pitchFamily="34" charset="-120"/>
-              </a:rPr>
-              <a:t> </a:t>
+              <a:t>Network operational state </a:t>
             </a:r>
             <a:r>
               <a:rPr lang="en-US" sz="1350" b="1" dirty="0">
@@ -13047,15 +13005,7 @@
                 <a:ea typeface="Calibri" pitchFamily="34" charset="-122"/>
                 <a:cs typeface="Calibri" pitchFamily="34" charset="-120"/>
               </a:rPr>
-              <a:t>Agent </a:t>
-            </a:r>
-            <a:r>
-              <a:rPr lang="en-US" sz="1150" dirty="0">
-                <a:latin typeface="Calibri" pitchFamily="34" charset="0"/>
-                <a:ea typeface="Calibri" pitchFamily="34" charset="-122"/>
-                <a:cs typeface="Calibri" pitchFamily="34" charset="-120"/>
-              </a:rPr>
-              <a:t>grasps a holistic view of the network operational </a:t>
+              <a:t>Agent grasps a holistic view of the network operational </a:t>
             </a:r>
             <a:r>
               <a:rPr lang="en-US" sz="1150" dirty="0" smtClean="0">
@@ -13065,11 +13015,6 @@
               </a:rPr>
               <a:t>state</a:t>
             </a:r>
-            <a:endParaRPr lang="en-US" sz="1150" dirty="0" smtClean="0">
-              <a:latin typeface="Calibri" pitchFamily="34" charset="0"/>
-              <a:ea typeface="Calibri" pitchFamily="34" charset="-122"/>
-              <a:cs typeface="Calibri" pitchFamily="34" charset="-120"/>
-            </a:endParaRPr>
           </a:p>
         </p:txBody>
       </p:sp>
